--- a/3-Master_Plan/re_entry/HEROs_and_PASSes/slides/auto/CHAR_ncaa_roster_size_distribution_AUTO.pptx
+++ b/3-Master_Plan/re_entry/HEROs_and_PASSes/slides/auto/CHAR_ncaa_roster_size_distribution_AUTO.pptx
@@ -5,9 +5,9 @@
     <p:sldMasterId id="2147483648" r:id="rId1"/>
   </p:sldMasterIdLst>
   <p:sldIdLst>
-    <p:sldId id="256" r:id="rId2"/>
+    <p:sldId id="256" r:id="rId7"/>
   </p:sldIdLst>
-  <p:sldSz cx="12192000" cy="6858000"/>
+  <p:sldSz cx="12191695" cy="6858000" type="screen4x3"/>
   <p:notesSz cx="6858000" cy="9144000"/>
   <p:defaultTextStyle>
     <a:defPPr>
@@ -104,22 +104,6 @@
       </a:defRPr>
     </a:lvl9pPr>
   </p:defaultTextStyle>
-  <p:extLst>
-    <p:ext uri="{EFAFB233-063F-42B5-8137-9DF3F51BA10A}">
-      <p15:sldGuideLst xmlns:p15="http://schemas.microsoft.com/office/powerpoint/2012/main">
-        <p15:guide id="1" orient="horz" pos="2160">
-          <p15:clr>
-            <a:srgbClr val="A4A3A4"/>
-          </p15:clr>
-        </p15:guide>
-        <p15:guide id="2" pos="2880">
-          <p15:clr>
-            <a:srgbClr val="A4A3A4"/>
-          </p15:clr>
-        </p15:guide>
-      </p15:sldGuideLst>
-    </p:ext>
-  </p:extLst>
 </p:presentation>
 </file>
 
@@ -161,9 +145,10 @@
           <a:lstStyle/>
           <a:p>
             <a:r>
-              <a:rPr lang="en-US"/>
+              <a:rPr lang="en-US" smtClean="0"/>
               <a:t>Click to edit Master title style</a:t>
             </a:r>
+            <a:endParaRPr lang="en-US"/>
           </a:p>
         </p:txBody>
       </p:sp>
@@ -279,9 +264,10 @@
           </a:lstStyle>
           <a:p>
             <a:r>
-              <a:rPr lang="en-US"/>
+              <a:rPr lang="en-US" smtClean="0"/>
               <a:t>Click to edit Master subtitle style</a:t>
             </a:r>
+            <a:endParaRPr lang="en-US"/>
           </a:p>
         </p:txBody>
       </p:sp>
@@ -302,7 +288,7 @@
           <a:p>
             <a:fld id="{5BCAD085-E8A6-8845-BD4E-CB4CCA059FC4}" type="datetimeFigureOut">
               <a:rPr lang="en-US" smtClean="0"/>
-              <a:t>8/11/26</a:t>
+              <a:t>1/27/13</a:t>
             </a:fld>
             <a:endParaRPr lang="en-US"/>
           </a:p>
@@ -396,9 +382,10 @@
           <a:lstStyle/>
           <a:p>
             <a:r>
-              <a:rPr lang="en-US"/>
+              <a:rPr lang="en-US" smtClean="0"/>
               <a:t>Click to edit Master title style</a:t>
             </a:r>
+            <a:endParaRPr lang="en-US"/>
           </a:p>
         </p:txBody>
       </p:sp>
@@ -419,37 +406,38 @@
           <a:p>
             <a:pPr lvl="0"/>
             <a:r>
-              <a:rPr lang="en-US"/>
+              <a:rPr lang="en-US" smtClean="0"/>
               <a:t>Click to edit Master text styles</a:t>
             </a:r>
           </a:p>
           <a:p>
             <a:pPr lvl="1"/>
             <a:r>
-              <a:rPr lang="en-US"/>
+              <a:rPr lang="en-US" smtClean="0"/>
               <a:t>Second level</a:t>
             </a:r>
           </a:p>
           <a:p>
             <a:pPr lvl="2"/>
             <a:r>
-              <a:rPr lang="en-US"/>
+              <a:rPr lang="en-US" smtClean="0"/>
               <a:t>Third level</a:t>
             </a:r>
           </a:p>
           <a:p>
             <a:pPr lvl="3"/>
             <a:r>
-              <a:rPr lang="en-US"/>
+              <a:rPr lang="en-US" smtClean="0"/>
               <a:t>Fourth level</a:t>
             </a:r>
           </a:p>
           <a:p>
             <a:pPr lvl="4"/>
             <a:r>
-              <a:rPr lang="en-US"/>
+              <a:rPr lang="en-US" smtClean="0"/>
               <a:t>Fifth level</a:t>
             </a:r>
+            <a:endParaRPr lang="en-US"/>
           </a:p>
         </p:txBody>
       </p:sp>
@@ -470,7 +458,7 @@
           <a:p>
             <a:fld id="{5BCAD085-E8A6-8845-BD4E-CB4CCA059FC4}" type="datetimeFigureOut">
               <a:rPr lang="en-US" smtClean="0"/>
-              <a:t>8/11/26</a:t>
+              <a:t>1/27/13</a:t>
             </a:fld>
             <a:endParaRPr lang="en-US"/>
           </a:p>
@@ -569,9 +557,10 @@
           <a:lstStyle/>
           <a:p>
             <a:r>
-              <a:rPr lang="en-US"/>
+              <a:rPr lang="en-US" smtClean="0"/>
               <a:t>Click to edit Master title style</a:t>
             </a:r>
+            <a:endParaRPr lang="en-US"/>
           </a:p>
         </p:txBody>
       </p:sp>
@@ -597,37 +586,38 @@
           <a:p>
             <a:pPr lvl="0"/>
             <a:r>
-              <a:rPr lang="en-US"/>
+              <a:rPr lang="en-US" smtClean="0"/>
               <a:t>Click to edit Master text styles</a:t>
             </a:r>
           </a:p>
           <a:p>
             <a:pPr lvl="1"/>
             <a:r>
-              <a:rPr lang="en-US"/>
+              <a:rPr lang="en-US" smtClean="0"/>
               <a:t>Second level</a:t>
             </a:r>
           </a:p>
           <a:p>
             <a:pPr lvl="2"/>
             <a:r>
-              <a:rPr lang="en-US"/>
+              <a:rPr lang="en-US" smtClean="0"/>
               <a:t>Third level</a:t>
             </a:r>
           </a:p>
           <a:p>
             <a:pPr lvl="3"/>
             <a:r>
-              <a:rPr lang="en-US"/>
+              <a:rPr lang="en-US" smtClean="0"/>
               <a:t>Fourth level</a:t>
             </a:r>
           </a:p>
           <a:p>
             <a:pPr lvl="4"/>
             <a:r>
-              <a:rPr lang="en-US"/>
+              <a:rPr lang="en-US" smtClean="0"/>
               <a:t>Fifth level</a:t>
             </a:r>
+            <a:endParaRPr lang="en-US"/>
           </a:p>
         </p:txBody>
       </p:sp>
@@ -648,7 +638,7 @@
           <a:p>
             <a:fld id="{5BCAD085-E8A6-8845-BD4E-CB4CCA059FC4}" type="datetimeFigureOut">
               <a:rPr lang="en-US" smtClean="0"/>
-              <a:t>8/11/26</a:t>
+              <a:t>1/27/13</a:t>
             </a:fld>
             <a:endParaRPr lang="en-US"/>
           </a:p>
@@ -742,9 +732,10 @@
           <a:lstStyle/>
           <a:p>
             <a:r>
-              <a:rPr lang="en-US"/>
+              <a:rPr lang="en-US" smtClean="0"/>
               <a:t>Click to edit Master title style</a:t>
             </a:r>
+            <a:endParaRPr lang="en-US"/>
           </a:p>
         </p:txBody>
       </p:sp>
@@ -765,37 +756,38 @@
           <a:p>
             <a:pPr lvl="0"/>
             <a:r>
-              <a:rPr lang="en-US"/>
+              <a:rPr lang="en-US" smtClean="0"/>
               <a:t>Click to edit Master text styles</a:t>
             </a:r>
           </a:p>
           <a:p>
             <a:pPr lvl="1"/>
             <a:r>
-              <a:rPr lang="en-US"/>
+              <a:rPr lang="en-US" smtClean="0"/>
               <a:t>Second level</a:t>
             </a:r>
           </a:p>
           <a:p>
             <a:pPr lvl="2"/>
             <a:r>
-              <a:rPr lang="en-US"/>
+              <a:rPr lang="en-US" smtClean="0"/>
               <a:t>Third level</a:t>
             </a:r>
           </a:p>
           <a:p>
             <a:pPr lvl="3"/>
             <a:r>
-              <a:rPr lang="en-US"/>
+              <a:rPr lang="en-US" smtClean="0"/>
               <a:t>Fourth level</a:t>
             </a:r>
           </a:p>
           <a:p>
             <a:pPr lvl="4"/>
             <a:r>
-              <a:rPr lang="en-US"/>
+              <a:rPr lang="en-US" smtClean="0"/>
               <a:t>Fifth level</a:t>
             </a:r>
+            <a:endParaRPr lang="en-US"/>
           </a:p>
         </p:txBody>
       </p:sp>
@@ -816,7 +808,7 @@
           <a:p>
             <a:fld id="{5BCAD085-E8A6-8845-BD4E-CB4CCA059FC4}" type="datetimeFigureOut">
               <a:rPr lang="en-US" smtClean="0"/>
-              <a:t>8/11/26</a:t>
+              <a:t>1/27/13</a:t>
             </a:fld>
             <a:endParaRPr lang="en-US"/>
           </a:p>
@@ -919,9 +911,10 @@
           </a:lstStyle>
           <a:p>
             <a:r>
-              <a:rPr lang="en-US"/>
+              <a:rPr lang="en-US" smtClean="0"/>
               <a:t>Click to edit Master title style</a:t>
             </a:r>
+            <a:endParaRPr lang="en-US"/>
           </a:p>
         </p:txBody>
       </p:sp>
@@ -1038,7 +1031,7 @@
           <a:p>
             <a:pPr lvl="0"/>
             <a:r>
-              <a:rPr lang="en-US"/>
+              <a:rPr lang="en-US" smtClean="0"/>
               <a:t>Click to edit Master text styles</a:t>
             </a:r>
           </a:p>
@@ -1061,7 +1054,7 @@
           <a:p>
             <a:fld id="{5BCAD085-E8A6-8845-BD4E-CB4CCA059FC4}" type="datetimeFigureOut">
               <a:rPr lang="en-US" smtClean="0"/>
-              <a:t>8/11/26</a:t>
+              <a:t>1/27/13</a:t>
             </a:fld>
             <a:endParaRPr lang="en-US"/>
           </a:p>
@@ -1155,9 +1148,10 @@
           <a:lstStyle/>
           <a:p>
             <a:r>
-              <a:rPr lang="en-US"/>
+              <a:rPr lang="en-US" smtClean="0"/>
               <a:t>Click to edit Master title style</a:t>
             </a:r>
+            <a:endParaRPr lang="en-US"/>
           </a:p>
         </p:txBody>
       </p:sp>
@@ -1211,37 +1205,38 @@
           <a:p>
             <a:pPr lvl="0"/>
             <a:r>
-              <a:rPr lang="en-US"/>
+              <a:rPr lang="en-US" smtClean="0"/>
               <a:t>Click to edit Master text styles</a:t>
             </a:r>
           </a:p>
           <a:p>
             <a:pPr lvl="1"/>
             <a:r>
-              <a:rPr lang="en-US"/>
+              <a:rPr lang="en-US" smtClean="0"/>
               <a:t>Second level</a:t>
             </a:r>
           </a:p>
           <a:p>
             <a:pPr lvl="2"/>
             <a:r>
-              <a:rPr lang="en-US"/>
+              <a:rPr lang="en-US" smtClean="0"/>
               <a:t>Third level</a:t>
             </a:r>
           </a:p>
           <a:p>
             <a:pPr lvl="3"/>
             <a:r>
-              <a:rPr lang="en-US"/>
+              <a:rPr lang="en-US" smtClean="0"/>
               <a:t>Fourth level</a:t>
             </a:r>
           </a:p>
           <a:p>
             <a:pPr lvl="4"/>
             <a:r>
-              <a:rPr lang="en-US"/>
+              <a:rPr lang="en-US" smtClean="0"/>
               <a:t>Fifth level</a:t>
             </a:r>
+            <a:endParaRPr lang="en-US"/>
           </a:p>
         </p:txBody>
       </p:sp>
@@ -1295,37 +1290,38 @@
           <a:p>
             <a:pPr lvl="0"/>
             <a:r>
-              <a:rPr lang="en-US"/>
+              <a:rPr lang="en-US" smtClean="0"/>
               <a:t>Click to edit Master text styles</a:t>
             </a:r>
           </a:p>
           <a:p>
             <a:pPr lvl="1"/>
             <a:r>
-              <a:rPr lang="en-US"/>
+              <a:rPr lang="en-US" smtClean="0"/>
               <a:t>Second level</a:t>
             </a:r>
           </a:p>
           <a:p>
             <a:pPr lvl="2"/>
             <a:r>
-              <a:rPr lang="en-US"/>
+              <a:rPr lang="en-US" smtClean="0"/>
               <a:t>Third level</a:t>
             </a:r>
           </a:p>
           <a:p>
             <a:pPr lvl="3"/>
             <a:r>
-              <a:rPr lang="en-US"/>
+              <a:rPr lang="en-US" smtClean="0"/>
               <a:t>Fourth level</a:t>
             </a:r>
           </a:p>
           <a:p>
             <a:pPr lvl="4"/>
             <a:r>
-              <a:rPr lang="en-US"/>
+              <a:rPr lang="en-US" smtClean="0"/>
               <a:t>Fifth level</a:t>
             </a:r>
+            <a:endParaRPr lang="en-US"/>
           </a:p>
         </p:txBody>
       </p:sp>
@@ -1346,7 +1342,7 @@
           <a:p>
             <a:fld id="{5BCAD085-E8A6-8845-BD4E-CB4CCA059FC4}" type="datetimeFigureOut">
               <a:rPr lang="en-US" smtClean="0"/>
-              <a:t>8/11/26</a:t>
+              <a:t>1/27/13</a:t>
             </a:fld>
             <a:endParaRPr lang="en-US"/>
           </a:p>
@@ -1444,9 +1440,10 @@
           </a:lstStyle>
           <a:p>
             <a:r>
-              <a:rPr lang="en-US"/>
+              <a:rPr lang="en-US" smtClean="0"/>
               <a:t>Click to edit Master title style</a:t>
             </a:r>
+            <a:endParaRPr lang="en-US"/>
           </a:p>
         </p:txBody>
       </p:sp>
@@ -1509,7 +1506,7 @@
           <a:p>
             <a:pPr lvl="0"/>
             <a:r>
-              <a:rPr lang="en-US"/>
+              <a:rPr lang="en-US" smtClean="0"/>
               <a:t>Click to edit Master text styles</a:t>
             </a:r>
           </a:p>
@@ -1565,37 +1562,38 @@
           <a:p>
             <a:pPr lvl="0"/>
             <a:r>
-              <a:rPr lang="en-US"/>
+              <a:rPr lang="en-US" smtClean="0"/>
               <a:t>Click to edit Master text styles</a:t>
             </a:r>
           </a:p>
           <a:p>
             <a:pPr lvl="1"/>
             <a:r>
-              <a:rPr lang="en-US"/>
+              <a:rPr lang="en-US" smtClean="0"/>
               <a:t>Second level</a:t>
             </a:r>
           </a:p>
           <a:p>
             <a:pPr lvl="2"/>
             <a:r>
-              <a:rPr lang="en-US"/>
+              <a:rPr lang="en-US" smtClean="0"/>
               <a:t>Third level</a:t>
             </a:r>
           </a:p>
           <a:p>
             <a:pPr lvl="3"/>
             <a:r>
-              <a:rPr lang="en-US"/>
+              <a:rPr lang="en-US" smtClean="0"/>
               <a:t>Fourth level</a:t>
             </a:r>
           </a:p>
           <a:p>
             <a:pPr lvl="4"/>
             <a:r>
-              <a:rPr lang="en-US"/>
+              <a:rPr lang="en-US" smtClean="0"/>
               <a:t>Fifth level</a:t>
             </a:r>
+            <a:endParaRPr lang="en-US"/>
           </a:p>
         </p:txBody>
       </p:sp>
@@ -1658,7 +1656,7 @@
           <a:p>
             <a:pPr lvl="0"/>
             <a:r>
-              <a:rPr lang="en-US"/>
+              <a:rPr lang="en-US" smtClean="0"/>
               <a:t>Click to edit Master text styles</a:t>
             </a:r>
           </a:p>
@@ -1714,37 +1712,38 @@
           <a:p>
             <a:pPr lvl="0"/>
             <a:r>
-              <a:rPr lang="en-US"/>
+              <a:rPr lang="en-US" smtClean="0"/>
               <a:t>Click to edit Master text styles</a:t>
             </a:r>
           </a:p>
           <a:p>
             <a:pPr lvl="1"/>
             <a:r>
-              <a:rPr lang="en-US"/>
+              <a:rPr lang="en-US" smtClean="0"/>
               <a:t>Second level</a:t>
             </a:r>
           </a:p>
           <a:p>
             <a:pPr lvl="2"/>
             <a:r>
-              <a:rPr lang="en-US"/>
+              <a:rPr lang="en-US" smtClean="0"/>
               <a:t>Third level</a:t>
             </a:r>
           </a:p>
           <a:p>
             <a:pPr lvl="3"/>
             <a:r>
-              <a:rPr lang="en-US"/>
+              <a:rPr lang="en-US" smtClean="0"/>
               <a:t>Fourth level</a:t>
             </a:r>
           </a:p>
           <a:p>
             <a:pPr lvl="4"/>
             <a:r>
-              <a:rPr lang="en-US"/>
+              <a:rPr lang="en-US" smtClean="0"/>
               <a:t>Fifth level</a:t>
             </a:r>
+            <a:endParaRPr lang="en-US"/>
           </a:p>
         </p:txBody>
       </p:sp>
@@ -1765,7 +1764,7 @@
           <a:p>
             <a:fld id="{5BCAD085-E8A6-8845-BD4E-CB4CCA059FC4}" type="datetimeFigureOut">
               <a:rPr lang="en-US" smtClean="0"/>
-              <a:t>8/11/26</a:t>
+              <a:t>1/27/13</a:t>
             </a:fld>
             <a:endParaRPr lang="en-US"/>
           </a:p>
@@ -1859,9 +1858,10 @@
           <a:lstStyle/>
           <a:p>
             <a:r>
-              <a:rPr lang="en-US"/>
+              <a:rPr lang="en-US" smtClean="0"/>
               <a:t>Click to edit Master title style</a:t>
             </a:r>
+            <a:endParaRPr lang="en-US"/>
           </a:p>
         </p:txBody>
       </p:sp>
@@ -1882,7 +1882,7 @@
           <a:p>
             <a:fld id="{5BCAD085-E8A6-8845-BD4E-CB4CCA059FC4}" type="datetimeFigureOut">
               <a:rPr lang="en-US" smtClean="0"/>
-              <a:t>8/11/26</a:t>
+              <a:t>1/27/13</a:t>
             </a:fld>
             <a:endParaRPr lang="en-US"/>
           </a:p>
@@ -1977,7 +1977,7 @@
           <a:p>
             <a:fld id="{5BCAD085-E8A6-8845-BD4E-CB4CCA059FC4}" type="datetimeFigureOut">
               <a:rPr lang="en-US" smtClean="0"/>
-              <a:t>8/11/26</a:t>
+              <a:t>1/27/13</a:t>
             </a:fld>
             <a:endParaRPr lang="en-US"/>
           </a:p>
@@ -2080,9 +2080,10 @@
           </a:lstStyle>
           <a:p>
             <a:r>
-              <a:rPr lang="en-US"/>
+              <a:rPr lang="en-US" smtClean="0"/>
               <a:t>Click to edit Master title style</a:t>
             </a:r>
+            <a:endParaRPr lang="en-US"/>
           </a:p>
         </p:txBody>
       </p:sp>
@@ -2136,37 +2137,38 @@
           <a:p>
             <a:pPr lvl="0"/>
             <a:r>
-              <a:rPr lang="en-US"/>
+              <a:rPr lang="en-US" smtClean="0"/>
               <a:t>Click to edit Master text styles</a:t>
             </a:r>
           </a:p>
           <a:p>
             <a:pPr lvl="1"/>
             <a:r>
-              <a:rPr lang="en-US"/>
+              <a:rPr lang="en-US" smtClean="0"/>
               <a:t>Second level</a:t>
             </a:r>
           </a:p>
           <a:p>
             <a:pPr lvl="2"/>
             <a:r>
-              <a:rPr lang="en-US"/>
+              <a:rPr lang="en-US" smtClean="0"/>
               <a:t>Third level</a:t>
             </a:r>
           </a:p>
           <a:p>
             <a:pPr lvl="3"/>
             <a:r>
-              <a:rPr lang="en-US"/>
+              <a:rPr lang="en-US" smtClean="0"/>
               <a:t>Fourth level</a:t>
             </a:r>
           </a:p>
           <a:p>
             <a:pPr lvl="4"/>
             <a:r>
-              <a:rPr lang="en-US"/>
+              <a:rPr lang="en-US" smtClean="0"/>
               <a:t>Fifth level</a:t>
             </a:r>
+            <a:endParaRPr lang="en-US"/>
           </a:p>
         </p:txBody>
       </p:sp>
@@ -2229,7 +2231,7 @@
           <a:p>
             <a:pPr lvl="0"/>
             <a:r>
-              <a:rPr lang="en-US"/>
+              <a:rPr lang="en-US" smtClean="0"/>
               <a:t>Click to edit Master text styles</a:t>
             </a:r>
           </a:p>
@@ -2252,7 +2254,7 @@
           <a:p>
             <a:fld id="{5BCAD085-E8A6-8845-BD4E-CB4CCA059FC4}" type="datetimeFigureOut">
               <a:rPr lang="en-US" smtClean="0"/>
-              <a:t>8/11/26</a:t>
+              <a:t>1/27/13</a:t>
             </a:fld>
             <a:endParaRPr lang="en-US"/>
           </a:p>
@@ -2355,9 +2357,10 @@
           </a:lstStyle>
           <a:p>
             <a:r>
-              <a:rPr lang="en-US"/>
+              <a:rPr lang="en-US" smtClean="0"/>
               <a:t>Click to edit Master title style</a:t>
             </a:r>
+            <a:endParaRPr lang="en-US"/>
           </a:p>
         </p:txBody>
       </p:sp>
@@ -2481,7 +2484,7 @@
           <a:p>
             <a:pPr lvl="0"/>
             <a:r>
-              <a:rPr lang="en-US"/>
+              <a:rPr lang="en-US" smtClean="0"/>
               <a:t>Click to edit Master text styles</a:t>
             </a:r>
           </a:p>
@@ -2504,7 +2507,7 @@
           <a:p>
             <a:fld id="{5BCAD085-E8A6-8845-BD4E-CB4CCA059FC4}" type="datetimeFigureOut">
               <a:rPr lang="en-US" smtClean="0"/>
-              <a:t>8/11/26</a:t>
+              <a:t>1/27/13</a:t>
             </a:fld>
             <a:endParaRPr lang="en-US"/>
           </a:p>
@@ -2613,9 +2616,10 @@
           <a:lstStyle/>
           <a:p>
             <a:r>
-              <a:rPr lang="en-US"/>
+              <a:rPr lang="en-US" smtClean="0"/>
               <a:t>Click to edit Master title style</a:t>
             </a:r>
+            <a:endParaRPr lang="en-US"/>
           </a:p>
         </p:txBody>
       </p:sp>
@@ -2646,37 +2650,38 @@
           <a:p>
             <a:pPr lvl="0"/>
             <a:r>
-              <a:rPr lang="en-US"/>
+              <a:rPr lang="en-US" smtClean="0"/>
               <a:t>Click to edit Master text styles</a:t>
             </a:r>
           </a:p>
           <a:p>
             <a:pPr lvl="1"/>
             <a:r>
-              <a:rPr lang="en-US"/>
+              <a:rPr lang="en-US" smtClean="0"/>
               <a:t>Second level</a:t>
             </a:r>
           </a:p>
           <a:p>
             <a:pPr lvl="2"/>
             <a:r>
-              <a:rPr lang="en-US"/>
+              <a:rPr lang="en-US" smtClean="0"/>
               <a:t>Third level</a:t>
             </a:r>
           </a:p>
           <a:p>
             <a:pPr lvl="3"/>
             <a:r>
-              <a:rPr lang="en-US"/>
+              <a:rPr lang="en-US" smtClean="0"/>
               <a:t>Fourth level</a:t>
             </a:r>
           </a:p>
           <a:p>
             <a:pPr lvl="4"/>
             <a:r>
-              <a:rPr lang="en-US"/>
+              <a:rPr lang="en-US" smtClean="0"/>
               <a:t>Fifth level</a:t>
             </a:r>
+            <a:endParaRPr lang="en-US"/>
           </a:p>
         </p:txBody>
       </p:sp>
@@ -2715,7 +2720,7 @@
           <a:p>
             <a:fld id="{5BCAD085-E8A6-8845-BD4E-CB4CCA059FC4}" type="datetimeFigureOut">
               <a:rPr lang="en-US" smtClean="0"/>
-              <a:t>8/11/26</a:t>
+              <a:t>1/27/13</a:t>
             </a:fld>
             <a:endParaRPr lang="en-US"/>
           </a:p>
@@ -3074,7 +3079,7 @@
 </file>
 
 <file path=ppt/slides/slide1.xml><?xml version="1.0" encoding="utf-8"?>
-<p:sld xmlns:a="http://schemas.openxmlformats.org/drawingml/2006/main" xmlns:r="http://schemas.openxmlformats.org/officeDocument/2006/relationships" xmlns:p="http://schemas.openxmlformats.org/presentationml/2006/main">
+<p:sld xmlns:a="http://schemas.openxmlformats.org/drawingml/2006/main" xmlns:p="http://schemas.openxmlformats.org/presentationml/2006/main" xmlns:r="http://schemas.openxmlformats.org/officeDocument/2006/relationships">
   <p:cSld>
     <p:spTree>
       <p:nvGrpSpPr>
@@ -3082,14 +3087,7 @@
         <p:cNvGrpSpPr/>
         <p:nvPr/>
       </p:nvGrpSpPr>
-      <p:grpSpPr>
-        <a:xfrm>
-          <a:off x="0" y="0"/>
-          <a:ext cx="0" cy="0"/>
-          <a:chOff x="0" y="0"/>
-          <a:chExt cx="0" cy="0"/>
-        </a:xfrm>
-      </p:grpSpPr>
+      <p:grpSpPr/>
       <p:sp>
         <p:nvSpPr>
           <p:cNvPr id="2" name="TextBox 1"/>
@@ -3168,8 +3166,8 @@
         </p:blipFill>
         <p:spPr>
           <a:xfrm>
-            <a:off x="908273" y="916050"/>
-            <a:ext cx="10375454" cy="4063452"/>
+            <a:off x="4379976" y="2070522"/>
+            <a:ext cx="7427671" cy="2908980"/>
           </a:xfrm>
           <a:prstGeom prst="rect">
             <a:avLst/>
@@ -3184,8 +3182,8 @@
         </p:nvSpPr>
         <p:spPr>
           <a:xfrm>
-            <a:off x="1089127" y="5405189"/>
-            <a:ext cx="11095528" cy="565952"/>
+            <a:off x="384048" y="3849624"/>
+            <a:ext cx="3794760" cy="2148840"/>
           </a:xfrm>
           <a:prstGeom prst="rect">
             <a:avLst/>
@@ -3193,39 +3191,45 @@
           <a:noFill/>
         </p:spPr>
         <p:txBody>
-          <a:bodyPr wrap="square" numCol="2">
-            <a:noAutofit/>
+          <a:bodyPr wrap="square">
+            <a:spAutoFit/>
           </a:bodyPr>
           <a:lstStyle/>
           <a:p>
             <a:pPr>
               <a:buChar char="•"/>
+              <a:lnSpc>
+                <a:spcPct val="150000"/>
+              </a:lnSpc>
+              <a:spcBef>
+                <a:spcPts val="0"/>
+              </a:spcBef>
+              <a:spcAft>
+                <a:spcPts val="0"/>
+              </a:spcAft>
             </a:pPr>
             <a:r>
-              <a:rPr sz="1000" b="0" i="0" baseline="0" dirty="0">
+              <a:rPr sz="1000" b="0" i="0" baseline="0">
                 <a:latin typeface="Calibri"/>
               </a:rPr>
-              <a:t>  Qualifying players per real NCAA team-season (\</a:t>
-            </a:r>
-            <a:r>
-              <a:rPr sz="1000" b="0" i="0" baseline="0" dirty="0" err="1">
-                <a:latin typeface="Calibri"/>
-              </a:rPr>
-              <a:t>geq</a:t>
-            </a:r>
-            <a:r>
-              <a:rPr sz="1000" b="0" i="0" baseline="0" dirty="0">
-                <a:latin typeface="Calibri"/>
-              </a:rPr>
-              <a:t> 20 ESPN minutes).</a:t>
+              <a:t>  Qualifying players per real NCAA team-season (\geq 20 ESPN minutes).</a:t>
             </a:r>
           </a:p>
           <a:p>
             <a:pPr>
               <a:buChar char="•"/>
+              <a:lnSpc>
+                <a:spcPct val="150000"/>
+              </a:lnSpc>
+              <a:spcBef>
+                <a:spcPts val="0"/>
+              </a:spcBef>
+              <a:spcAft>
+                <a:spcPts val="0"/>
+              </a:spcAft>
             </a:pPr>
             <a:r>
-              <a:rPr sz="1000" b="0" i="0" baseline="0" dirty="0">
+              <a:rPr sz="1000" b="0" i="0" baseline="0">
                 <a:latin typeface="Calibri"/>
               </a:rPr>
               <a:t>  $n=6,492$ team-seasons · mean=9.6 · median=11 · sd=3.6.</a:t>
@@ -3234,9 +3238,18 @@
           <a:p>
             <a:pPr>
               <a:buChar char="•"/>
+              <a:lnSpc>
+                <a:spcPct val="150000"/>
+              </a:lnSpc>
+              <a:spcBef>
+                <a:spcPts val="0"/>
+              </a:spcBef>
+              <a:spcAft>
+                <a:spcPts val="0"/>
+              </a:spcAft>
             </a:pPr>
             <a:r>
-              <a:rPr sz="1000" b="0" i="0" baseline="0" dirty="0">
+              <a:rPr sz="1000" b="0" i="0" baseline="0">
                 <a:latin typeface="Calibri"/>
               </a:rPr>
               <a:t>  Red dotted = NCAA mean; orange dashed = LG fixed $C=15$.</a:t>
@@ -3245,9 +3258,18 @@
           <a:p>
             <a:pPr>
               <a:buChar char="•"/>
+              <a:lnSpc>
+                <a:spcPct val="150000"/>
+              </a:lnSpc>
+              <a:spcBef>
+                <a:spcPts val="0"/>
+              </a:spcBef>
+              <a:spcAft>
+                <a:spcPts val="0"/>
+              </a:spcAft>
             </a:pPr>
             <a:r>
-              <a:rPr sz="1000" b="0" i="0" baseline="0" dirty="0">
+              <a:rPr sz="1000" b="0" i="0" baseline="0">
                 <a:latin typeface="Calibri"/>
               </a:rPr>
               <a:t>  Only 2.3\% of teams have exactly 15 qualifying players.</a:t>
@@ -3256,9 +3278,18 @@
           <a:p>
             <a:pPr>
               <a:buChar char="•"/>
+              <a:lnSpc>
+                <a:spcPct val="150000"/>
+              </a:lnSpc>
+              <a:spcBef>
+                <a:spcPts val="0"/>
+              </a:spcBef>
+              <a:spcAft>
+                <a:spcPts val="0"/>
+              </a:spcAft>
             </a:pPr>
             <a:r>
-              <a:rPr sz="1000" b="0" i="0" baseline="0" dirty="0">
+              <a:rPr sz="1000" b="0" i="0" baseline="0">
                 <a:latin typeface="Calibri"/>
               </a:rPr>
               <a:t>  Same ability pool ~62k; LG repacks into J=N/15 synthetic 15-man leagues.</a:t>
@@ -3267,9 +3298,18 @@
           <a:p>
             <a:pPr>
               <a:buChar char="•"/>
+              <a:lnSpc>
+                <a:spcPct val="150000"/>
+              </a:lnSpc>
+              <a:spcBef>
+                <a:spcPts val="0"/>
+              </a:spcBef>
+              <a:spcAft>
+                <a:spcPts val="0"/>
+              </a:spcAft>
             </a:pPr>
             <a:r>
-              <a:rPr sz="1000" b="0" i="0" baseline="0" dirty="0">
+              <a:rPr sz="1000" b="0" i="0" baseline="0">
                 <a:latin typeface="Calibri"/>
               </a:rPr>
               <a:t>  Minutes floor shapes peer count — state explicitly in methods.</a:t>
